--- a/Презентация/готовые/РЕХАУ Калькулятор снеготаяния — шпаргалка A4.pptx
+++ b/Презентация/готовые/РЕХАУ Калькулятор снеготаяния — шпаргалка A4.pptx
@@ -183,7 +183,7 @@
               </a:lnSpc>
             </a:pPr>
             <a:r>
-              <a:rPr lang="en-US" sz="3000" b="1">
+              <a:rPr lang="en-US" sz="3000" noProof="1" b="1">
                 <a:solidFill>
                   <a:srgbClr val="FFFFFF"/>
                 </a:solidFill>
@@ -192,7 +192,7 @@
               </a:rPr>
               <a:t>Калькулятор снеготаяния</a:t>
             </a:r>
-            <a:endParaRPr lang="en-US" sz="3000"/>
+            <a:endParaRPr lang="en-US" sz="3000" noProof="1"/>
           </a:p>
         </p:txBody>
       </p:sp>
@@ -225,7 +225,7 @@
               </a:lnSpc>
             </a:pPr>
             <a:r>
-              <a:rPr lang="en-US" sz="1300">
+              <a:rPr lang="en-US" sz="1300" noProof="1">
                 <a:solidFill>
                   <a:srgbClr val="B0B0B0"/>
                 </a:solidFill>
@@ -234,7 +234,7 @@
               </a:rPr>
               <a:t>Шпаргалка проектировщика · антиобледенение открытых площадок</a:t>
             </a:r>
-            <a:endParaRPr lang="en-US" sz="1300"/>
+            <a:endParaRPr lang="en-US" sz="1300" noProof="1"/>
           </a:p>
         </p:txBody>
       </p:sp>
@@ -289,16 +289,16 @@
               </a:lnSpc>
             </a:pPr>
             <a:r>
-              <a:rPr lang="en-US" sz="3600" b="1">
+              <a:rPr lang="en-US" sz="3600" noProof="1" b="1">
                 <a:solidFill>
                   <a:srgbClr val="FFFFFF"/>
                 </a:solidFill>
                 <a:latin typeface="MiSans"/>
                 <a:ea typeface="MiSans"/>
               </a:rPr>
-              <a:t>55,8</a:t>
-            </a:r>
-            <a:endParaRPr lang="en-US" sz="3600"/>
+              <a:t>96,8</a:t>
+            </a:r>
+            <a:endParaRPr lang="en-US" sz="3600" noProof="1"/>
           </a:p>
         </p:txBody>
       </p:sp>
@@ -331,7 +331,7 @@
               </a:lnSpc>
             </a:pPr>
             <a:r>
-              <a:rPr lang="en-US" sz="1100">
+              <a:rPr lang="en-US" sz="1100" noProof="1">
                 <a:solidFill>
                   <a:srgbClr val="FFFFFF">
                     <a:alpha val="80000"/>
@@ -342,7 +342,7 @@
               </a:rPr>
               <a:t>кВт — мощность системы</a:t>
             </a:r>
-            <a:endParaRPr lang="en-US" sz="1100"/>
+            <a:endParaRPr lang="en-US" sz="1100" noProof="1"/>
           </a:p>
         </p:txBody>
       </p:sp>
@@ -375,7 +375,7 @@
               </a:lnSpc>
             </a:pPr>
             <a:r>
-              <a:rPr lang="en-US" sz="3600" b="1">
+              <a:rPr lang="en-US" sz="3600" noProof="1" b="1">
                 <a:solidFill>
                   <a:srgbClr val="FFFFFF"/>
                 </a:solidFill>
@@ -384,7 +384,7 @@
               </a:rPr>
               <a:t>920</a:t>
             </a:r>
-            <a:endParaRPr lang="en-US" sz="3600"/>
+            <a:endParaRPr lang="en-US" sz="3600" noProof="1"/>
           </a:p>
         </p:txBody>
       </p:sp>
@@ -417,7 +417,7 @@
               </a:lnSpc>
             </a:pPr>
             <a:r>
-              <a:rPr lang="en-US" sz="1100">
+              <a:rPr lang="en-US" sz="1100" noProof="1">
                 <a:solidFill>
                   <a:srgbClr val="FFFFFF">
                     <a:alpha val="80000"/>
@@ -428,7 +428,7 @@
               </a:rPr>
               <a:t>м — труба RAUTHERM S 20×2,0</a:t>
             </a:r>
-            <a:endParaRPr lang="en-US" sz="1100"/>
+            <a:endParaRPr lang="en-US" sz="1100" noProof="1"/>
           </a:p>
         </p:txBody>
       </p:sp>
@@ -461,7 +461,7 @@
               </a:lnSpc>
             </a:pPr>
             <a:r>
-              <a:rPr lang="en-US" sz="3600" b="1">
+              <a:rPr lang="en-US" sz="3600" noProof="1" b="1">
                 <a:solidFill>
                   <a:srgbClr val="FFFFFF"/>
                 </a:solidFill>
@@ -470,7 +470,7 @@
               </a:rPr>
               <a:t>335,4</a:t>
             </a:r>
-            <a:endParaRPr lang="en-US" sz="3600"/>
+            <a:endParaRPr lang="en-US" sz="3600" noProof="1"/>
           </a:p>
         </p:txBody>
       </p:sp>
@@ -503,7 +503,7 @@
               </a:lnSpc>
             </a:pPr>
             <a:r>
-              <a:rPr lang="en-US" sz="1100">
+              <a:rPr lang="en-US" sz="1100" noProof="1">
                 <a:solidFill>
                   <a:srgbClr val="FFFFFF">
                     <a:alpha val="80000"/>
@@ -514,7 +514,7 @@
               </a:rPr>
               <a:t>Вт/м² — удельная мощность</a:t>
             </a:r>
-            <a:endParaRPr lang="en-US" sz="1100"/>
+            <a:endParaRPr lang="en-US" sz="1100" noProof="1"/>
           </a:p>
         </p:txBody>
       </p:sp>
@@ -547,16 +547,16 @@
               </a:lnSpc>
             </a:pPr>
             <a:r>
-              <a:rPr lang="en-US" sz="3600" b="1">
+              <a:rPr lang="en-US" sz="3600" noProof="1" b="1">
                 <a:solidFill>
                   <a:srgbClr val="FFFFFF"/>
                 </a:solidFill>
                 <a:latin typeface="MiSans"/>
                 <a:ea typeface="MiSans"/>
               </a:rPr>
-              <a:t>18</a:t>
-            </a:r>
-            <a:endParaRPr lang="en-US" sz="3600"/>
+              <a:t>19</a:t>
+            </a:r>
+            <a:endParaRPr lang="en-US" sz="3600" noProof="1"/>
           </a:p>
         </p:txBody>
       </p:sp>
@@ -589,7 +589,7 @@
               </a:lnSpc>
             </a:pPr>
             <a:r>
-              <a:rPr lang="en-US" sz="1100">
+              <a:rPr lang="en-US" sz="1100" noProof="1">
                 <a:solidFill>
                   <a:srgbClr val="FFFFFF">
                     <a:alpha val="80000"/>
@@ -600,7 +600,7 @@
               </a:rPr>
               <a:t>контуров на 4 коллекторах</a:t>
             </a:r>
-            <a:endParaRPr lang="en-US" sz="1100"/>
+            <a:endParaRPr lang="en-US" sz="1100" noProof="1"/>
           </a:p>
         </p:txBody>
       </p:sp>
@@ -633,7 +633,7 @@
               </a:lnSpc>
             </a:pPr>
             <a:r>
-              <a:rPr lang="en-US" sz="1000">
+              <a:rPr lang="en-US" sz="1000" noProof="1">
                 <a:solidFill>
                   <a:srgbClr val="818181"/>
                 </a:solidFill>
@@ -642,7 +642,7 @@
               </a:rPr>
               <a:t>Цифры реального расчёта: Екатеринбург, обогрев наружных поверхностей (режим Melting, этиленгликоль 40 %)</a:t>
             </a:r>
-            <a:endParaRPr lang="en-US" sz="1000"/>
+            <a:endParaRPr lang="en-US" sz="1000" noProof="1"/>
           </a:p>
         </p:txBody>
       </p:sp>
@@ -675,7 +675,7 @@
               </a:lnSpc>
             </a:pPr>
             <a:r>
-              <a:rPr lang="en-US" sz="2000" b="1">
+              <a:rPr lang="en-US" sz="2000" noProof="1" b="1">
                 <a:solidFill>
                   <a:srgbClr val="000000"/>
                 </a:solidFill>
@@ -684,7 +684,7 @@
               </a:rPr>
               <a:t>5 шагов до результата</a:t>
             </a:r>
-            <a:endParaRPr lang="en-US" sz="2000"/>
+            <a:endParaRPr lang="en-US" sz="2000" noProof="1"/>
           </a:p>
         </p:txBody>
       </p:sp>
@@ -761,7 +761,7 @@
               </a:lnSpc>
             </a:pPr>
             <a:r>
-              <a:rPr lang="en-US" sz="1400" b="1">
+              <a:rPr lang="en-US" sz="1400" noProof="1" b="1">
                 <a:solidFill>
                   <a:srgbClr val="FFFFFF"/>
                 </a:solidFill>
@@ -770,7 +770,7 @@
               </a:rPr>
               <a:t>1</a:t>
             </a:r>
-            <a:endParaRPr lang="en-US" sz="1400"/>
+            <a:endParaRPr lang="en-US" sz="1400" noProof="1"/>
           </a:p>
         </p:txBody>
       </p:sp>
@@ -803,7 +803,7 @@
               </a:lnSpc>
             </a:pPr>
             <a:r>
-              <a:rPr lang="en-US" sz="1200" b="1">
+              <a:rPr lang="en-US" sz="1200" noProof="1" b="1">
                 <a:solidFill>
                   <a:srgbClr val="4E4E4E"/>
                 </a:solidFill>
@@ -813,7 +813,7 @@
               <a:t>Климат.</a:t>
             </a:r>
             <a:r>
-              <a:rPr lang="en-US" sz="1200">
+              <a:rPr lang="en-US" sz="1200" noProof="1">
                 <a:solidFill>
                   <a:srgbClr val="4E4E4E"/>
                 </a:solidFill>
@@ -822,7 +822,7 @@
               </a:rPr>
               <a:t> Введите город — температура, ветер и влажность подставятся из базы 550 городов РФ по СП 131.13330.2025</a:t>
             </a:r>
-            <a:endParaRPr lang="en-US" sz="1200"/>
+            <a:endParaRPr lang="en-US" sz="1200" noProof="1"/>
           </a:p>
         </p:txBody>
       </p:sp>
@@ -877,7 +877,7 @@
               </a:lnSpc>
             </a:pPr>
             <a:r>
-              <a:rPr lang="en-US" sz="1400" b="1">
+              <a:rPr lang="en-US" sz="1400" noProof="1" b="1">
                 <a:solidFill>
                   <a:srgbClr val="FFFFFF"/>
                 </a:solidFill>
@@ -886,7 +886,7 @@
               </a:rPr>
               <a:t>2</a:t>
             </a:r>
-            <a:endParaRPr lang="en-US" sz="1400"/>
+            <a:endParaRPr lang="en-US" sz="1400" noProof="1"/>
           </a:p>
         </p:txBody>
       </p:sp>
@@ -919,7 +919,7 @@
               </a:lnSpc>
             </a:pPr>
             <a:r>
-              <a:rPr lang="en-US" sz="1200" b="1">
+              <a:rPr lang="en-US" sz="1200" noProof="1" b="1">
                 <a:solidFill>
                   <a:srgbClr val="4E4E4E"/>
                 </a:solidFill>
@@ -929,16 +929,16 @@
               <a:t>Конструкция.</a:t>
             </a:r>
             <a:r>
-              <a:rPr lang="en-US" sz="1200">
+              <a:rPr lang="en-US" sz="1200" noProof="1">
                 <a:solidFill>
                   <a:srgbClr val="4E4E4E"/>
                 </a:solidFill>
                 <a:latin typeface="MiSans"/>
                 <a:ea typeface="MiSans"/>
               </a:rPr>
-              <a:t> Возьмите один из 4 шаблонов «пирога» или соберите слои сами — R₁, R₂ и разрез пересчитаются сразу</a:t>
-            </a:r>
-            <a:endParaRPr lang="en-US" sz="1200"/>
+              <a:t> Возьмите один из 3 шаблонов «пирога» или соберите слои сами — R₁, R₂ и разрез пересчитаются сразу</a:t>
+            </a:r>
+            <a:endParaRPr lang="en-US" sz="1200" noProof="1"/>
           </a:p>
         </p:txBody>
       </p:sp>
@@ -993,7 +993,7 @@
               </a:lnSpc>
             </a:pPr>
             <a:r>
-              <a:rPr lang="en-US" sz="1400" b="1">
+              <a:rPr lang="en-US" sz="1400" noProof="1" b="1">
                 <a:solidFill>
                   <a:srgbClr val="FFFFFF"/>
                 </a:solidFill>
@@ -1002,7 +1002,7 @@
               </a:rPr>
               <a:t>3</a:t>
             </a:r>
-            <a:endParaRPr lang="en-US" sz="1400"/>
+            <a:endParaRPr lang="en-US" sz="1400" noProof="1"/>
           </a:p>
         </p:txBody>
       </p:sp>
@@ -1035,7 +1035,7 @@
               </a:lnSpc>
             </a:pPr>
             <a:r>
-              <a:rPr lang="en-US" sz="1200" b="1">
+              <a:rPr lang="en-US" sz="1200" noProof="1" b="1">
                 <a:solidFill>
                   <a:srgbClr val="4E4E4E"/>
                 </a:solidFill>
@@ -1045,7 +1045,7 @@
               <a:t>Тепловой расчёт.</a:t>
             </a:r>
             <a:r>
-              <a:rPr lang="en-US" sz="1200">
+              <a:rPr lang="en-US" sz="1200" noProof="1">
                 <a:solidFill>
                   <a:srgbClr val="4E4E4E"/>
                 </a:solidFill>
@@ -1054,7 +1054,7 @@
               </a:rPr>
               <a:t> Режим Melting, труба RAUTHERM S и шаг укладки → кнопка «Рассчитать» даёт мощность, Вт/м²</a:t>
             </a:r>
-            <a:endParaRPr lang="en-US" sz="1200"/>
+            <a:endParaRPr lang="en-US" sz="1200" noProof="1"/>
           </a:p>
         </p:txBody>
       </p:sp>
@@ -1109,7 +1109,7 @@
               </a:lnSpc>
             </a:pPr>
             <a:r>
-              <a:rPr lang="en-US" sz="1400" b="1">
+              <a:rPr lang="en-US" sz="1400" noProof="1" b="1">
                 <a:solidFill>
                   <a:srgbClr val="FFFFFF"/>
                 </a:solidFill>
@@ -1118,7 +1118,7 @@
               </a:rPr>
               <a:t>4</a:t>
             </a:r>
-            <a:endParaRPr lang="en-US" sz="1400"/>
+            <a:endParaRPr lang="en-US" sz="1400" noProof="1"/>
           </a:p>
         </p:txBody>
       </p:sp>
@@ -1151,7 +1151,7 @@
               </a:lnSpc>
             </a:pPr>
             <a:r>
-              <a:rPr lang="en-US" sz="1200" b="1">
+              <a:rPr lang="en-US" sz="1200" noProof="1" b="1">
                 <a:solidFill>
                   <a:srgbClr val="4E4E4E"/>
                 </a:solidFill>
@@ -1161,7 +1161,7 @@
               <a:t>Гидравлика.</a:t>
             </a:r>
             <a:r>
-              <a:rPr lang="en-US" sz="1200">
+              <a:rPr lang="en-US" sz="1200" noProof="1">
                 <a:solidFill>
                   <a:srgbClr val="4E4E4E"/>
                 </a:solidFill>
@@ -1170,7 +1170,7 @@
               </a:rPr>
               <a:t> Гликоль, коллекторы и контуры → потери давления, балансировка по VDI 2075 и обороты вентилей</a:t>
             </a:r>
-            <a:endParaRPr lang="en-US" sz="1200"/>
+            <a:endParaRPr lang="en-US" sz="1200" noProof="1"/>
           </a:p>
         </p:txBody>
       </p:sp>
@@ -1225,7 +1225,7 @@
               </a:lnSpc>
             </a:pPr>
             <a:r>
-              <a:rPr lang="en-US" sz="1400" b="1">
+              <a:rPr lang="en-US" sz="1400" noProof="1" b="1">
                 <a:solidFill>
                   <a:srgbClr val="000000"/>
                 </a:solidFill>
@@ -1234,7 +1234,7 @@
               </a:rPr>
               <a:t>5</a:t>
             </a:r>
-            <a:endParaRPr lang="en-US" sz="1400"/>
+            <a:endParaRPr lang="en-US" sz="1400" noProof="1"/>
           </a:p>
         </p:txBody>
       </p:sp>
@@ -1267,7 +1267,7 @@
               </a:lnSpc>
             </a:pPr>
             <a:r>
-              <a:rPr lang="en-US" sz="1200" b="1">
+              <a:rPr lang="en-US" sz="1200" noProof="1" b="1">
                 <a:solidFill>
                   <a:srgbClr val="4E4E4E"/>
                 </a:solidFill>
@@ -1277,7 +1277,7 @@
               <a:t>Результаты.</a:t>
             </a:r>
             <a:r>
-              <a:rPr lang="en-US" sz="1200">
+              <a:rPr lang="en-US" sz="1200" noProof="1">
                 <a:solidFill>
                   <a:srgbClr val="4E4E4E"/>
                 </a:solidFill>
@@ -1286,7 +1286,7 @@
               </a:rPr>
               <a:t> КПИ, ведомость оборудования с артикулами РЕХАУ и брендированный отчёт PDF — в один клик</a:t>
             </a:r>
-            <a:endParaRPr lang="en-US" sz="1200"/>
+            <a:endParaRPr lang="en-US" sz="1200" noProof="1"/>
           </a:p>
         </p:txBody>
       </p:sp>
@@ -1345,7 +1345,7 @@
               </a:lnSpc>
             </a:pPr>
             <a:r>
-              <a:rPr lang="en-US" sz="1600" b="1">
+              <a:rPr lang="en-US" sz="1600" noProof="1" b="1">
                 <a:solidFill>
                   <a:srgbClr val="000000"/>
                 </a:solidFill>
@@ -1354,7 +1354,7 @@
               </a:rPr>
               <a:t>Проверьте перед выгрузкой отчёта</a:t>
             </a:r>
-            <a:endParaRPr lang="en-US" sz="1600"/>
+            <a:endParaRPr lang="en-US" sz="1600" noProof="1"/>
           </a:p>
         </p:txBody>
       </p:sp>
@@ -1409,7 +1409,7 @@
               </a:lnSpc>
             </a:pPr>
             <a:r>
-              <a:rPr lang="en-US" sz="1200">
+              <a:rPr lang="en-US" sz="1200" noProof="1">
                 <a:solidFill>
                   <a:srgbClr val="4E4E4E"/>
                 </a:solidFill>
@@ -1418,7 +1418,7 @@
               </a:rPr>
               <a:t>Все бейджи шагов — зелёные (красный = нажмите «Рассчитать» ещё раз)</a:t>
             </a:r>
-            <a:endParaRPr lang="en-US" sz="1200"/>
+            <a:endParaRPr lang="en-US" sz="1200" noProof="1"/>
           </a:p>
         </p:txBody>
       </p:sp>
@@ -1473,7 +1473,7 @@
               </a:lnSpc>
             </a:pPr>
             <a:r>
-              <a:rPr lang="en-US" sz="1200">
+              <a:rPr lang="en-US" sz="1200" noProof="1">
                 <a:solidFill>
                   <a:srgbClr val="4E4E4E"/>
                 </a:solidFill>
@@ -1482,7 +1482,7 @@
               </a:rPr>
               <a:t>Длина контура Ø20 — не более 120 м; над трубой — от 40/50 мм «пирога»</a:t>
             </a:r>
-            <a:endParaRPr lang="en-US" sz="1200"/>
+            <a:endParaRPr lang="en-US" sz="1200" noProof="1"/>
           </a:p>
         </p:txBody>
       </p:sp>
@@ -1537,7 +1537,7 @@
               </a:lnSpc>
             </a:pPr>
             <a:r>
-              <a:rPr lang="en-US" sz="1200">
+              <a:rPr lang="en-US" sz="1200" noProof="1">
                 <a:solidFill>
                   <a:srgbClr val="4E4E4E"/>
                 </a:solidFill>
@@ -1546,7 +1546,7 @@
               </a:rPr>
               <a:t>Температура подачи ≤ 50 °C для бетона; асфальт — только при t ≥ −15 °C</a:t>
             </a:r>
-            <a:endParaRPr lang="en-US" sz="1200"/>
+            <a:endParaRPr lang="en-US" sz="1200" noProof="1"/>
           </a:p>
         </p:txBody>
       </p:sp>
@@ -1601,7 +1601,7 @@
               </a:lnSpc>
             </a:pPr>
             <a:r>
-              <a:rPr lang="en-US" sz="1200">
+              <a:rPr lang="en-US" sz="1200" noProof="1">
                 <a:solidFill>
                   <a:srgbClr val="4E4E4E"/>
                 </a:solidFill>
@@ -1610,7 +1610,7 @@
               </a:rPr>
               <a:t>Потери давления на коллекторе — в пределах 320 мбар, смотрите рабочее и холодное ΔP</a:t>
             </a:r>
-            <a:endParaRPr lang="en-US" sz="1200"/>
+            <a:endParaRPr lang="en-US" sz="1200" noProof="1"/>
           </a:p>
         </p:txBody>
       </p:sp>
@@ -1665,7 +1665,7 @@
               </a:lnSpc>
             </a:pPr>
             <a:r>
-              <a:rPr lang="en-US" sz="1200">
+              <a:rPr lang="en-US" sz="1200" noProof="1">
                 <a:solidFill>
                   <a:srgbClr val="4E4E4E"/>
                 </a:solidFill>
@@ -1674,7 +1674,7 @@
               </a:rPr>
               <a:t>Проект сохранён в .smc — отчёт PDF можно обновить в любой момент</a:t>
             </a:r>
-            <a:endParaRPr lang="en-US" sz="1200"/>
+            <a:endParaRPr lang="en-US" sz="1200" noProof="1"/>
           </a:p>
         </p:txBody>
       </p:sp>
@@ -1729,7 +1729,7 @@
               </a:lnSpc>
             </a:pPr>
             <a:r>
-              <a:rPr lang="en-US" sz="1100" b="1">
+              <a:rPr lang="en-US" sz="1100" noProof="1" b="1">
                 <a:solidFill>
                   <a:srgbClr val="4E4E4E"/>
                 </a:solidFill>
@@ -1739,7 +1739,7 @@
               <a:t>В спецификации:</a:t>
             </a:r>
             <a:r>
-              <a:rPr lang="en-US" sz="1100">
+              <a:rPr lang="en-US" sz="1100" noProof="1">
                 <a:solidFill>
                   <a:srgbClr val="4E4E4E"/>
                 </a:solidFill>
@@ -1748,7 +1748,7 @@
               </a:rPr>
               <a:t> трубы RAUTHERM S 17/20/25 · коллекторы HKV-D и IV 1¼″ / 1½″</a:t>
             </a:r>
-            <a:endParaRPr lang="en-US" sz="1100"/>
+            <a:endParaRPr lang="en-US" sz="1100" noProof="1"/>
           </a:p>
         </p:txBody>
       </p:sp>
@@ -1781,7 +1781,7 @@
               </a:lnSpc>
             </a:pPr>
             <a:r>
-              <a:rPr lang="en-US" sz="1000">
+              <a:rPr lang="en-US" sz="1000" noProof="1">
                 <a:solidFill>
                   <a:srgbClr val="818181"/>
                 </a:solidFill>
@@ -1790,7 +1790,7 @@
               </a:rPr>
               <a:t>Методика: СП 131.13330.2025 · VDI 2075 · DIN EN 60534 · ASHRAE</a:t>
             </a:r>
-            <a:endParaRPr lang="en-US" sz="1000"/>
+            <a:endParaRPr lang="en-US" sz="1000" noProof="1"/>
           </a:p>
         </p:txBody>
       </p:sp>
@@ -1823,16 +1823,16 @@
               </a:lnSpc>
             </a:pPr>
             <a:r>
-              <a:rPr lang="en-US" sz="1000">
+              <a:rPr lang="en-US" sz="1000" noProof="1">
                 <a:solidFill>
                   <a:srgbClr val="B0B0B0"/>
                 </a:solidFill>
                 <a:latin typeface="MiSans"/>
                 <a:ea typeface="MiSans"/>
               </a:rPr>
-              <a:t>Решения для дома и бизнеса · контакты — placeholder</a:t>
-            </a:r>
-            <a:endParaRPr lang="en-US" sz="1000"/>
+              <a:t>Асадуллин Айдар · aydar.asadullin@rhsolutions.ru · +7 922 157 01 80</a:t>
+            </a:r>
+            <a:endParaRPr lang="en-US" sz="1000" noProof="1"/>
           </a:p>
         </p:txBody>
       </p:sp>
@@ -1983,4 +1983,11 @@
     </a:fmtScheme>
   </a:themeElements>
 </a:theme>
+</file>
+
+<file path=customXml/provenance.xml><?xml version="1.0" encoding="utf-8"?>
+<provenance xmlns="urn:kimi:pptd:provenance">
+  <producer>Kimi Slides/Design</producer>
+  <statement>Built by Kimi Slides/Design with PPTD</statement>
+</provenance>
 </file>